--- a/atelier/atelier-x04-feature-sheet.pptx
+++ b/atelier/atelier-x04-feature-sheet.pptx
@@ -3404,7 +3404,7 @@
         </p:nvSpPr>
         <p:spPr>
           <a:xfrm>
-            <a:off x="857250" y="10256788"/>
+            <a:off x="857250" y="10022086"/>
             <a:ext cx="7000875" cy="9525"/>
           </a:xfrm>
           <a:prstGeom prst="rect">
@@ -3448,7 +3448,7 @@
         </p:nvSpPr>
         <p:spPr>
           <a:xfrm>
-            <a:off x="857250" y="10990213"/>
+            <a:off x="857250" y="10755511"/>
             <a:ext cx="7000875" cy="9525"/>
           </a:xfrm>
           <a:prstGeom prst="rect">
@@ -3492,7 +3492,7 @@
         </p:nvSpPr>
         <p:spPr>
           <a:xfrm>
-            <a:off x="857250" y="11723638"/>
+            <a:off x="857250" y="11488936"/>
             <a:ext cx="7000875" cy="9525"/>
           </a:xfrm>
           <a:prstGeom prst="rect">
@@ -3536,7 +3536,7 @@
         </p:nvSpPr>
         <p:spPr>
           <a:xfrm>
-            <a:off x="8334375" y="10256788"/>
+            <a:off x="8334375" y="10022086"/>
             <a:ext cx="7000875" cy="9525"/>
           </a:xfrm>
           <a:prstGeom prst="rect">
@@ -3580,7 +3580,7 @@
         </p:nvSpPr>
         <p:spPr>
           <a:xfrm>
-            <a:off x="8334375" y="10990213"/>
+            <a:off x="8334375" y="10755511"/>
             <a:ext cx="7000875" cy="9525"/>
           </a:xfrm>
           <a:prstGeom prst="rect">
@@ -3624,7 +3624,7 @@
         </p:nvSpPr>
         <p:spPr>
           <a:xfrm>
-            <a:off x="8334375" y="11723638"/>
+            <a:off x="8334375" y="11488936"/>
             <a:ext cx="7000875" cy="9525"/>
           </a:xfrm>
           <a:prstGeom prst="rect">
@@ -3861,7 +3861,7 @@
         <p:spPr>
           <a:xfrm>
             <a:off x="857250" y="2066925"/>
-            <a:ext cx="23545800" cy="1181100"/>
+            <a:ext cx="23545800" cy="946398"/>
           </a:xfrm>
           <a:prstGeom prst="rect">
             <a:avLst/>
@@ -3872,7 +3872,11 @@
           <a:bodyPr wrap="none" anchor="t" lIns="0" rIns="0" tIns="0" bIns="0"/>
           <a:lstStyle/>
           <a:p>
-            <a:pPr algn="l"/>
+            <a:pPr algn="l">
+              <a:lnSpc>
+                <a:spcPct val="92000"/>
+              </a:lnSpc>
+            </a:pPr>
             <a:r>
               <a:rPr sz="8100" i="1" b="0">
                 <a:solidFill>
@@ -3895,7 +3899,7 @@
         </p:nvSpPr>
         <p:spPr>
           <a:xfrm>
-            <a:off x="857250" y="3362325"/>
+            <a:off x="857250" y="3127623"/>
             <a:ext cx="7925038" cy="455563"/>
           </a:xfrm>
           <a:prstGeom prst="rect">
@@ -3934,7 +3938,7 @@
         </p:nvSpPr>
         <p:spPr>
           <a:xfrm>
-            <a:off x="5858024" y="3600450"/>
+            <a:off x="5858024" y="3365748"/>
             <a:ext cx="5031343" cy="200025"/>
           </a:xfrm>
           <a:prstGeom prst="rect">
@@ -3969,7 +3973,7 @@
         </p:nvSpPr>
         <p:spPr>
           <a:xfrm>
-            <a:off x="857250" y="9685288"/>
+            <a:off x="857250" y="9450586"/>
             <a:ext cx="716280" cy="230386"/>
           </a:xfrm>
           <a:prstGeom prst="rect">
@@ -4008,7 +4012,7 @@
         </p:nvSpPr>
         <p:spPr>
           <a:xfrm>
-            <a:off x="1238250" y="9685288"/>
+            <a:off x="1238250" y="9450586"/>
             <a:ext cx="5432822" cy="219075"/>
           </a:xfrm>
           <a:prstGeom prst="rect">
@@ -4043,7 +4047,7 @@
         </p:nvSpPr>
         <p:spPr>
           <a:xfrm>
-            <a:off x="1238250" y="9932938"/>
+            <a:off x="1238250" y="9698236"/>
             <a:ext cx="5432822" cy="171450"/>
           </a:xfrm>
           <a:prstGeom prst="rect">
@@ -4082,7 +4086,7 @@
         </p:nvSpPr>
         <p:spPr>
           <a:xfrm>
-            <a:off x="857250" y="10418713"/>
+            <a:off x="857250" y="10184011"/>
             <a:ext cx="716280" cy="230386"/>
           </a:xfrm>
           <a:prstGeom prst="rect">
@@ -4121,7 +4125,7 @@
         </p:nvSpPr>
         <p:spPr>
           <a:xfrm>
-            <a:off x="1238250" y="10418713"/>
+            <a:off x="1238250" y="10184011"/>
             <a:ext cx="5338286" cy="219075"/>
           </a:xfrm>
           <a:prstGeom prst="rect">
@@ -4156,7 +4160,7 @@
         </p:nvSpPr>
         <p:spPr>
           <a:xfrm>
-            <a:off x="1238250" y="10666363"/>
+            <a:off x="1238250" y="10431661"/>
             <a:ext cx="5338286" cy="171450"/>
           </a:xfrm>
           <a:prstGeom prst="rect">
@@ -4195,7 +4199,7 @@
         </p:nvSpPr>
         <p:spPr>
           <a:xfrm>
-            <a:off x="857250" y="11152138"/>
+            <a:off x="857250" y="10917436"/>
             <a:ext cx="716280" cy="230386"/>
           </a:xfrm>
           <a:prstGeom prst="rect">
@@ -4234,7 +4238,7 @@
         </p:nvSpPr>
         <p:spPr>
           <a:xfrm>
-            <a:off x="1238250" y="11152138"/>
+            <a:off x="1238250" y="10917436"/>
             <a:ext cx="4861084" cy="219075"/>
           </a:xfrm>
           <a:prstGeom prst="rect">
@@ -4269,7 +4273,7 @@
         </p:nvSpPr>
         <p:spPr>
           <a:xfrm>
-            <a:off x="1238250" y="11399788"/>
+            <a:off x="1238250" y="11165086"/>
             <a:ext cx="4861084" cy="171450"/>
           </a:xfrm>
           <a:prstGeom prst="rect">
@@ -4308,7 +4312,7 @@
         </p:nvSpPr>
         <p:spPr>
           <a:xfrm>
-            <a:off x="8334375" y="9685288"/>
+            <a:off x="8334375" y="9450586"/>
             <a:ext cx="716280" cy="230386"/>
           </a:xfrm>
           <a:prstGeom prst="rect">
@@ -4347,7 +4351,7 @@
         </p:nvSpPr>
         <p:spPr>
           <a:xfrm>
-            <a:off x="8715375" y="9685288"/>
+            <a:off x="8715375" y="9450586"/>
             <a:ext cx="5259943" cy="219075"/>
           </a:xfrm>
           <a:prstGeom prst="rect">
@@ -4382,7 +4386,7 @@
         </p:nvSpPr>
         <p:spPr>
           <a:xfrm>
-            <a:off x="8715375" y="9932938"/>
+            <a:off x="8715375" y="9698236"/>
             <a:ext cx="5259943" cy="171450"/>
           </a:xfrm>
           <a:prstGeom prst="rect">
@@ -4421,7 +4425,7 @@
         </p:nvSpPr>
         <p:spPr>
           <a:xfrm>
-            <a:off x="8334375" y="10418713"/>
+            <a:off x="8334375" y="10184011"/>
             <a:ext cx="716280" cy="230386"/>
           </a:xfrm>
           <a:prstGeom prst="rect">
@@ -4460,7 +4464,7 @@
         </p:nvSpPr>
         <p:spPr>
           <a:xfrm>
-            <a:off x="8715375" y="10418713"/>
+            <a:off x="8715375" y="10184011"/>
             <a:ext cx="4525089" cy="219075"/>
           </a:xfrm>
           <a:prstGeom prst="rect">
@@ -4495,7 +4499,7 @@
         </p:nvSpPr>
         <p:spPr>
           <a:xfrm>
-            <a:off x="8715375" y="10666363"/>
+            <a:off x="8715375" y="10431661"/>
             <a:ext cx="4525089" cy="171450"/>
           </a:xfrm>
           <a:prstGeom prst="rect">
@@ -4534,7 +4538,7 @@
         </p:nvSpPr>
         <p:spPr>
           <a:xfrm>
-            <a:off x="8334375" y="11152138"/>
+            <a:off x="8334375" y="10917436"/>
             <a:ext cx="716280" cy="230386"/>
           </a:xfrm>
           <a:prstGeom prst="rect">
@@ -4573,7 +4577,7 @@
         </p:nvSpPr>
         <p:spPr>
           <a:xfrm>
-            <a:off x="8715375" y="11152138"/>
+            <a:off x="8715375" y="10917436"/>
             <a:ext cx="5138261" cy="219075"/>
           </a:xfrm>
           <a:prstGeom prst="rect">
@@ -4608,7 +4612,7 @@
         </p:nvSpPr>
         <p:spPr>
           <a:xfrm>
-            <a:off x="8715375" y="11399788"/>
+            <a:off x="8715375" y="11165086"/>
             <a:ext cx="5138261" cy="171450"/>
           </a:xfrm>
           <a:prstGeom prst="rect">
@@ -4725,7 +4729,7 @@
         </p:blipFill>
         <p:spPr>
           <a:xfrm>
-            <a:off x="857250" y="4198888"/>
+            <a:off x="857250" y="3964186"/>
             <a:ext cx="6090642" cy="4953000"/>
           </a:xfrm>
           <a:prstGeom prst="rect">
@@ -4749,7 +4753,7 @@
         </p:blipFill>
         <p:spPr>
           <a:xfrm>
-            <a:off x="7081242" y="4198888"/>
+            <a:off x="7081242" y="3964186"/>
             <a:ext cx="4060329" cy="2409825"/>
           </a:xfrm>
           <a:prstGeom prst="rect">
@@ -4773,7 +4777,7 @@
         </p:blipFill>
         <p:spPr>
           <a:xfrm>
-            <a:off x="7081242" y="6742063"/>
+            <a:off x="7081242" y="6507361"/>
             <a:ext cx="4060329" cy="2409825"/>
           </a:xfrm>
           <a:prstGeom prst="rect">
@@ -4797,7 +4801,7 @@
         </p:blipFill>
         <p:spPr>
           <a:xfrm>
-            <a:off x="11274921" y="4198888"/>
+            <a:off x="11274921" y="3964186"/>
             <a:ext cx="4060329" cy="2409825"/>
           </a:xfrm>
           <a:prstGeom prst="rect">
@@ -4821,7 +4825,7 @@
         </p:blipFill>
         <p:spPr>
           <a:xfrm>
-            <a:off x="11274921" y="6742063"/>
+            <a:off x="11274921" y="6507361"/>
             <a:ext cx="4060329" cy="2409825"/>
           </a:xfrm>
           <a:prstGeom prst="rect">
